--- a/Docs/接線說明.pptx
+++ b/Docs/接線說明.pptx
@@ -31,7 +31,7 @@
       </p:grpSpPr>
       <p:sp>
         <p:nvSpPr>
-          <p:cNvPr id="6" name="PlaceHolder 1"/>
+          <p:cNvPr id="7" name="PlaceHolder 1"/>
           <p:cNvSpPr>
             <a:spLocks noGrp="1"/>
           </p:cNvSpPr>
@@ -42,7 +42,7 @@
         <p:spPr>
           <a:xfrm>
             <a:off x="504000" y="363600"/>
-            <a:ext cx="9071280" cy="671040"/>
+            <a:ext cx="9070920" cy="671040"/>
           </a:xfrm>
           <a:prstGeom prst="rect">
             <a:avLst/>
@@ -57,7 +57,7 @@
             <a:spAutoFit/>
           </a:bodyPr>
           <a:p>
-            <a:pPr indent="0" algn="ctr">
+            <a:pPr indent="0" algn="l">
               <a:buNone/>
               <a:tabLst>
                 <a:tab pos="0" algn="l"/>
@@ -76,7 +76,7 @@
       </p:sp>
       <p:sp>
         <p:nvSpPr>
-          <p:cNvPr id="7" name="PlaceHolder 2"/>
+          <p:cNvPr id="8" name="PlaceHolder 2"/>
           <p:cNvSpPr>
             <a:spLocks noGrp="1"/>
           </p:cNvSpPr>
@@ -87,7 +87,7 @@
         <p:spPr>
           <a:xfrm>
             <a:off x="504000" y="2726280"/>
-            <a:ext cx="9071280" cy="488160"/>
+            <a:ext cx="9070920" cy="488160"/>
           </a:xfrm>
           <a:prstGeom prst="rect">
             <a:avLst/>
@@ -150,7 +150,7 @@
         <p:txBody>
           <a:bodyPr/>
           <a:p>
-            <a:fld id="{FC7CC336-F438-4E33-BDA2-F670537A9C05}" type="slidenum">
+            <a:fld id="{57064AAD-EF14-402A-ACD6-1F6C27F91A69}" type="slidenum">
               <a:t>&lt;#&gt;</a:t>
             </a:fld>
           </a:p>
@@ -212,7 +212,7 @@
         <p:spPr>
           <a:xfrm>
             <a:off x="504000" y="363600"/>
-            <a:ext cx="9071280" cy="670680"/>
+            <a:ext cx="9070920" cy="670680"/>
           </a:xfrm>
           <a:prstGeom prst="rect">
             <a:avLst/>
@@ -284,7 +284,7 @@
         <p:spPr>
           <a:xfrm>
             <a:off x="3447360" y="5165280"/>
-            <a:ext cx="3194640" cy="390240"/>
+            <a:ext cx="3194280" cy="389880"/>
           </a:xfrm>
           <a:prstGeom prst="rect">
             <a:avLst/>
@@ -336,7 +336,7 @@
                 <a:uFillTx/>
                 <a:latin typeface="Times New Roman"/>
               </a:rPr>
-              <a:t> </a:t>
+              <a:t>&lt;頁尾&gt;</a:t>
             </a:r>
             <a:endParaRPr lang="en-US" sz="1400" b="0" u="none" strike="noStrike">
               <a:solidFill>
@@ -362,7 +362,7 @@
         <p:spPr>
           <a:xfrm>
             <a:off x="7227360" y="5165280"/>
-            <a:ext cx="2347920" cy="390240"/>
+            <a:ext cx="2347560" cy="389880"/>
           </a:xfrm>
           <a:prstGeom prst="rect">
             <a:avLst/>
@@ -405,7 +405,7 @@
                 <a:tab pos="0" algn="l"/>
               </a:tabLst>
             </a:pPr>
-            <a:fld id="{CE7F5C17-BD2E-4456-8711-3AA90EBEB6D0}" type="slidenum">
+            <a:fld id="{74C773D8-9573-4E6A-BA53-DFAF696D6F64}" type="slidenum">
               <a:rPr lang="en-US" sz="1400" b="0" u="none" strike="noStrike">
                 <a:solidFill>
                   <a:srgbClr val="000000"/>
@@ -414,7 +414,7 @@
                 <a:uFillTx/>
                 <a:latin typeface="Times New Roman"/>
               </a:rPr>
-              <a:t>1</a:t>
+              <a:t>&lt;編號&gt;</a:t>
             </a:fld>
             <a:endParaRPr lang="en-US" sz="1400" b="0" u="none" strike="noStrike">
               <a:solidFill>
@@ -440,7 +440,7 @@
         <p:spPr>
           <a:xfrm>
             <a:off x="504000" y="5165280"/>
-            <a:ext cx="2347920" cy="390240"/>
+            <a:ext cx="2347560" cy="389880"/>
           </a:xfrm>
           <a:prstGeom prst="rect">
             <a:avLst/>
@@ -480,7 +480,7 @@
                 <a:uFillTx/>
                 <a:latin typeface="Times New Roman"/>
               </a:rPr>
-              <a:t> </a:t>
+              <a:t>&lt;日期/時間&gt;</a:t>
             </a:r>
             <a:endParaRPr lang="en-US" sz="1400" b="0" u="none" strike="noStrike">
               <a:solidFill>
@@ -489,6 +489,394 @@
               <a:effectLst/>
               <a:uFillTx/>
               <a:latin typeface="Times New Roman"/>
+            </a:endParaRPr>
+          </a:p>
+        </p:txBody>
+      </p:sp>
+      <p:sp>
+        <p:nvSpPr>
+          <p:cNvPr id="6" name="PlaceHolder 5"/>
+          <p:cNvSpPr>
+            <a:spLocks noGrp="1"/>
+          </p:cNvSpPr>
+          <p:nvPr>
+            <p:ph type="body"/>
+          </p:nvPr>
+        </p:nvSpPr>
+        <p:spPr>
+          <a:xfrm>
+            <a:off x="504000" y="1326600"/>
+            <a:ext cx="9072000" cy="3288600"/>
+          </a:xfrm>
+          <a:prstGeom prst="rect">
+            <a:avLst/>
+          </a:prstGeom>
+          <a:noFill/>
+          <a:ln w="0">
+            <a:noFill/>
+          </a:ln>
+        </p:spPr>
+        <p:txBody>
+          <a:bodyPr lIns="0" tIns="0" rIns="0" bIns="0" anchor="t">
+            <a:normAutofit/>
+          </a:bodyPr>
+          <a:lstStyle>
+            <a:lvl1pPr algn="l">
+              <a:spcBef>
+                <a:spcPts val="1417"/>
+              </a:spcBef>
+              <a:buClr>
+                <a:srgbClr val="000000"/>
+              </a:buClr>
+              <a:buSzPct val="45000"/>
+              <a:buFont typeface="Wingdings" charset="2"/>
+              <a:buChar char=""/>
+              <a:defRPr lang="zh-TW" sz="3200" b="0" u="none" strike="noStrike">
+                <a:solidFill>
+                  <a:srgbClr val="000000"/>
+                </a:solidFill>
+                <a:effectLst/>
+                <a:uFillTx/>
+                <a:latin typeface="Arial"/>
+              </a:defRPr>
+            </a:lvl1pPr>
+            <a:lvl2pPr lvl="1" algn="l">
+              <a:spcBef>
+                <a:spcPts val="1134"/>
+              </a:spcBef>
+              <a:buClr>
+                <a:srgbClr val="000000"/>
+              </a:buClr>
+              <a:buSzPct val="75000"/>
+              <a:buFont typeface="Symbol" charset="2"/>
+              <a:buChar char=""/>
+              <a:defRPr lang="zh-TW" sz="2800" b="0" u="none" strike="noStrike">
+                <a:solidFill>
+                  <a:srgbClr val="000000"/>
+                </a:solidFill>
+                <a:effectLst/>
+                <a:uFillTx/>
+                <a:latin typeface="Arial"/>
+              </a:defRPr>
+            </a:lvl2pPr>
+            <a:lvl3pPr lvl="2" algn="l">
+              <a:spcBef>
+                <a:spcPts val="850"/>
+              </a:spcBef>
+              <a:buClr>
+                <a:srgbClr val="000000"/>
+              </a:buClr>
+              <a:buSzPct val="45000"/>
+              <a:buFont typeface="Wingdings" charset="2"/>
+              <a:buChar char=""/>
+              <a:defRPr lang="zh-TW" sz="2400" b="0" u="none" strike="noStrike">
+                <a:solidFill>
+                  <a:srgbClr val="000000"/>
+                </a:solidFill>
+                <a:effectLst/>
+                <a:uFillTx/>
+                <a:latin typeface="Arial"/>
+              </a:defRPr>
+            </a:lvl3pPr>
+            <a:lvl4pPr lvl="3" algn="l">
+              <a:spcBef>
+                <a:spcPts val="567"/>
+              </a:spcBef>
+              <a:buClr>
+                <a:srgbClr val="000000"/>
+              </a:buClr>
+              <a:buSzPct val="75000"/>
+              <a:buFont typeface="Symbol" charset="2"/>
+              <a:buChar char=""/>
+              <a:defRPr lang="zh-TW" sz="2000" b="0" u="none" strike="noStrike">
+                <a:solidFill>
+                  <a:srgbClr val="000000"/>
+                </a:solidFill>
+                <a:effectLst/>
+                <a:uFillTx/>
+                <a:latin typeface="Arial"/>
+              </a:defRPr>
+            </a:lvl4pPr>
+            <a:lvl5pPr lvl="4" algn="l">
+              <a:spcBef>
+                <a:spcPts val="283"/>
+              </a:spcBef>
+              <a:buClr>
+                <a:srgbClr val="000000"/>
+              </a:buClr>
+              <a:buSzPct val="45000"/>
+              <a:buFont typeface="Wingdings" charset="2"/>
+              <a:buChar char=""/>
+              <a:defRPr lang="zh-TW" sz="2000" b="0" u="none" strike="noStrike">
+                <a:solidFill>
+                  <a:srgbClr val="000000"/>
+                </a:solidFill>
+                <a:effectLst/>
+                <a:uFillTx/>
+                <a:latin typeface="Arial"/>
+              </a:defRPr>
+            </a:lvl5pPr>
+            <a:lvl6pPr lvl="5" algn="l">
+              <a:spcBef>
+                <a:spcPts val="283"/>
+              </a:spcBef>
+              <a:buClr>
+                <a:srgbClr val="000000"/>
+              </a:buClr>
+              <a:buSzPct val="45000"/>
+              <a:buFont typeface="Wingdings" charset="2"/>
+              <a:buChar char=""/>
+              <a:defRPr lang="zh-TW" sz="2000" b="0" u="none" strike="noStrike">
+                <a:solidFill>
+                  <a:srgbClr val="000000"/>
+                </a:solidFill>
+                <a:effectLst/>
+                <a:uFillTx/>
+                <a:latin typeface="Arial"/>
+              </a:defRPr>
+            </a:lvl6pPr>
+            <a:lvl7pPr lvl="6" algn="l">
+              <a:spcBef>
+                <a:spcPts val="283"/>
+              </a:spcBef>
+              <a:buClr>
+                <a:srgbClr val="000000"/>
+              </a:buClr>
+              <a:buSzPct val="45000"/>
+              <a:buFont typeface="Wingdings" charset="2"/>
+              <a:buChar char=""/>
+              <a:defRPr lang="zh-TW" sz="2000" b="0" u="none" strike="noStrike">
+                <a:solidFill>
+                  <a:srgbClr val="000000"/>
+                </a:solidFill>
+                <a:effectLst/>
+                <a:uFillTx/>
+                <a:latin typeface="Arial"/>
+              </a:defRPr>
+            </a:lvl7pPr>
+          </a:lstStyle>
+          <a:p>
+            <a:pPr marL="432000" indent="-324000" algn="l">
+              <a:spcBef>
+                <a:spcPts val="1417"/>
+              </a:spcBef>
+              <a:buClr>
+                <a:srgbClr val="000000"/>
+              </a:buClr>
+              <a:buSzPct val="45000"/>
+              <a:buFont typeface="Wingdings" charset="2"/>
+              <a:buChar char=""/>
+            </a:pPr>
+            <a:r>
+              <a:rPr lang="zh-TW" sz="3200" b="0" u="none" strike="noStrike">
+                <a:solidFill>
+                  <a:srgbClr val="000000"/>
+                </a:solidFill>
+                <a:effectLst/>
+                <a:uFillTx/>
+                <a:latin typeface="Arial"/>
+              </a:rPr>
+              <a:t>請按這裡編輯大綱文字格式</a:t>
+            </a:r>
+            <a:endParaRPr lang="en-US" sz="3200" b="0" u="none" strike="noStrike">
+              <a:solidFill>
+                <a:srgbClr val="000000"/>
+              </a:solidFill>
+              <a:effectLst/>
+              <a:uFillTx/>
+              <a:latin typeface="Arial"/>
+            </a:endParaRPr>
+          </a:p>
+          <a:p>
+            <a:pPr marL="864000" lvl="1" indent="-324000" algn="l">
+              <a:spcBef>
+                <a:spcPts val="1134"/>
+              </a:spcBef>
+              <a:buClr>
+                <a:srgbClr val="000000"/>
+              </a:buClr>
+              <a:buSzPct val="75000"/>
+              <a:buFont typeface="Symbol" charset="2"/>
+              <a:buChar char=""/>
+            </a:pPr>
+            <a:r>
+              <a:rPr lang="zh-TW" sz="2800" b="0" u="none" strike="noStrike">
+                <a:solidFill>
+                  <a:srgbClr val="000000"/>
+                </a:solidFill>
+                <a:effectLst/>
+                <a:uFillTx/>
+                <a:latin typeface="Arial"/>
+              </a:rPr>
+              <a:t>第二個大綱層次</a:t>
+            </a:r>
+            <a:endParaRPr lang="en-US" sz="2800" b="0" u="none" strike="noStrike">
+              <a:solidFill>
+                <a:srgbClr val="000000"/>
+              </a:solidFill>
+              <a:effectLst/>
+              <a:uFillTx/>
+              <a:latin typeface="Arial"/>
+            </a:endParaRPr>
+          </a:p>
+          <a:p>
+            <a:pPr marL="1296000" lvl="2" indent="-288000" algn="l">
+              <a:spcBef>
+                <a:spcPts val="850"/>
+              </a:spcBef>
+              <a:buClr>
+                <a:srgbClr val="000000"/>
+              </a:buClr>
+              <a:buSzPct val="45000"/>
+              <a:buFont typeface="Wingdings" charset="2"/>
+              <a:buChar char=""/>
+            </a:pPr>
+            <a:r>
+              <a:rPr lang="zh-TW" sz="2400" b="0" u="none" strike="noStrike">
+                <a:solidFill>
+                  <a:srgbClr val="000000"/>
+                </a:solidFill>
+                <a:effectLst/>
+                <a:uFillTx/>
+                <a:latin typeface="Arial"/>
+              </a:rPr>
+              <a:t>第三個大綱層次</a:t>
+            </a:r>
+            <a:endParaRPr lang="en-US" sz="2400" b="0" u="none" strike="noStrike">
+              <a:solidFill>
+                <a:srgbClr val="000000"/>
+              </a:solidFill>
+              <a:effectLst/>
+              <a:uFillTx/>
+              <a:latin typeface="Arial"/>
+            </a:endParaRPr>
+          </a:p>
+          <a:p>
+            <a:pPr marL="1728000" lvl="3" indent="-216000" algn="l">
+              <a:spcBef>
+                <a:spcPts val="567"/>
+              </a:spcBef>
+              <a:buClr>
+                <a:srgbClr val="000000"/>
+              </a:buClr>
+              <a:buSzPct val="75000"/>
+              <a:buFont typeface="Symbol" charset="2"/>
+              <a:buChar char=""/>
+            </a:pPr>
+            <a:r>
+              <a:rPr lang="zh-TW" sz="2000" b="0" u="none" strike="noStrike">
+                <a:solidFill>
+                  <a:srgbClr val="000000"/>
+                </a:solidFill>
+                <a:effectLst/>
+                <a:uFillTx/>
+                <a:latin typeface="Arial"/>
+              </a:rPr>
+              <a:t>第四個大綱層次</a:t>
+            </a:r>
+            <a:endParaRPr lang="en-US" sz="2000" b="0" u="none" strike="noStrike">
+              <a:solidFill>
+                <a:srgbClr val="000000"/>
+              </a:solidFill>
+              <a:effectLst/>
+              <a:uFillTx/>
+              <a:latin typeface="Arial"/>
+            </a:endParaRPr>
+          </a:p>
+          <a:p>
+            <a:pPr marL="2160000" lvl="4" indent="-216000" algn="l">
+              <a:spcBef>
+                <a:spcPts val="283"/>
+              </a:spcBef>
+              <a:buClr>
+                <a:srgbClr val="000000"/>
+              </a:buClr>
+              <a:buSzPct val="45000"/>
+              <a:buFont typeface="Wingdings" charset="2"/>
+              <a:buChar char=""/>
+            </a:pPr>
+            <a:r>
+              <a:rPr lang="zh-TW" sz="2000" b="0" u="none" strike="noStrike">
+                <a:solidFill>
+                  <a:srgbClr val="000000"/>
+                </a:solidFill>
+                <a:effectLst/>
+                <a:uFillTx/>
+                <a:latin typeface="Arial"/>
+              </a:rPr>
+              <a:t>第五個大綱層次</a:t>
+            </a:r>
+            <a:endParaRPr lang="en-US" sz="2000" b="0" u="none" strike="noStrike">
+              <a:solidFill>
+                <a:srgbClr val="000000"/>
+              </a:solidFill>
+              <a:effectLst/>
+              <a:uFillTx/>
+              <a:latin typeface="Arial"/>
+            </a:endParaRPr>
+          </a:p>
+          <a:p>
+            <a:pPr marL="2592000" lvl="5" indent="-216000" algn="l">
+              <a:spcBef>
+                <a:spcPts val="283"/>
+              </a:spcBef>
+              <a:buClr>
+                <a:srgbClr val="000000"/>
+              </a:buClr>
+              <a:buSzPct val="45000"/>
+              <a:buFont typeface="Wingdings" charset="2"/>
+              <a:buChar char=""/>
+            </a:pPr>
+            <a:r>
+              <a:rPr lang="zh-TW" sz="2000" b="0" u="none" strike="noStrike">
+                <a:solidFill>
+                  <a:srgbClr val="000000"/>
+                </a:solidFill>
+                <a:effectLst/>
+                <a:uFillTx/>
+                <a:latin typeface="Arial"/>
+              </a:rPr>
+              <a:t>第六個大綱層次</a:t>
+            </a:r>
+            <a:endParaRPr lang="en-US" sz="2000" b="0" u="none" strike="noStrike">
+              <a:solidFill>
+                <a:srgbClr val="000000"/>
+              </a:solidFill>
+              <a:effectLst/>
+              <a:uFillTx/>
+              <a:latin typeface="Arial"/>
+            </a:endParaRPr>
+          </a:p>
+          <a:p>
+            <a:pPr marL="3024000" lvl="6" indent="-216000" algn="l">
+              <a:spcBef>
+                <a:spcPts val="283"/>
+              </a:spcBef>
+              <a:buClr>
+                <a:srgbClr val="000000"/>
+              </a:buClr>
+              <a:buSzPct val="45000"/>
+              <a:buFont typeface="Wingdings" charset="2"/>
+              <a:buChar char=""/>
+            </a:pPr>
+            <a:r>
+              <a:rPr lang="zh-TW" sz="2000" b="0" u="none" strike="noStrike">
+                <a:solidFill>
+                  <a:srgbClr val="000000"/>
+                </a:solidFill>
+                <a:effectLst/>
+                <a:uFillTx/>
+                <a:latin typeface="Arial"/>
+              </a:rPr>
+              <a:t>第七個大綱層次</a:t>
+            </a:r>
+            <a:endParaRPr lang="en-US" sz="2000" b="0" u="none" strike="noStrike">
+              <a:solidFill>
+                <a:srgbClr val="000000"/>
+              </a:solidFill>
+              <a:effectLst/>
+              <a:uFillTx/>
+              <a:latin typeface="Arial"/>
             </a:endParaRPr>
           </a:p>
         </p:txBody>
@@ -521,14 +909,14 @@
       </p:grpSpPr>
       <p:sp>
         <p:nvSpPr>
-          <p:cNvPr id="8" name=""/>
+          <p:cNvPr id="9" name=""/>
           <p:cNvSpPr/>
           <p:nvPr/>
         </p:nvSpPr>
         <p:spPr>
           <a:xfrm>
-            <a:off x="540360" y="2520000"/>
-            <a:ext cx="1799640" cy="539640"/>
+            <a:off x="540360" y="2349360"/>
+            <a:ext cx="1799280" cy="719280"/>
           </a:xfrm>
           <a:prstGeom prst="rect">
             <a:avLst/>
@@ -583,14 +971,14 @@
       </p:sp>
       <p:sp>
         <p:nvSpPr>
-          <p:cNvPr id="9" name=""/>
+          <p:cNvPr id="10" name=""/>
           <p:cNvSpPr/>
           <p:nvPr/>
         </p:nvSpPr>
         <p:spPr>
           <a:xfrm>
-            <a:off x="3420000" y="2358720"/>
-            <a:ext cx="1439640" cy="719640"/>
+            <a:off x="3180240" y="2349360"/>
+            <a:ext cx="1439280" cy="719280"/>
           </a:xfrm>
           <a:prstGeom prst="rect">
             <a:avLst/>
@@ -672,14 +1060,14 @@
       </p:sp>
       <p:sp>
         <p:nvSpPr>
-          <p:cNvPr id="10" name=""/>
+          <p:cNvPr id="11" name=""/>
           <p:cNvSpPr/>
           <p:nvPr/>
         </p:nvSpPr>
         <p:spPr>
           <a:xfrm>
-            <a:off x="8100000" y="2340360"/>
-            <a:ext cx="1440000" cy="719640"/>
+            <a:off x="8100000" y="2349360"/>
+            <a:ext cx="1439640" cy="719280"/>
           </a:xfrm>
           <a:prstGeom prst="rect">
             <a:avLst/>
@@ -761,22 +1149,22 @@
       </p:sp>
       <p:sp>
         <p:nvSpPr>
-          <p:cNvPr id="11" name=""/>
+          <p:cNvPr id="12" name=""/>
           <p:cNvSpPr/>
           <p:nvPr/>
         </p:nvSpPr>
         <p:spPr>
           <a:xfrm>
-            <a:off x="360000" y="360000"/>
-            <a:ext cx="2159640" cy="899640"/>
+            <a:off x="360000" y="378000"/>
+            <a:ext cx="2159280" cy="899280"/>
           </a:xfrm>
           <a:custGeom>
             <a:avLst/>
             <a:gdLst>
-              <a:gd name="textAreaLeft" fmla="*/ 299880 w 2159640"/>
-              <a:gd name="textAreaRight" fmla="*/ 1711080 w 2159640"/>
-              <a:gd name="textAreaTop" fmla="*/ 138240 h 899640"/>
-              <a:gd name="textAreaBottom" fmla="*/ 722160 h 899640"/>
+              <a:gd name="textAreaLeft" fmla="*/ 299880 w 2159280"/>
+              <a:gd name="textAreaRight" fmla="*/ 1711080 w 2159280"/>
+              <a:gd name="textAreaTop" fmla="*/ 138240 h 899280"/>
+              <a:gd name="textAreaBottom" fmla="*/ 722160 h 899280"/>
             </a:gdLst>
             <a:ahLst/>
             <a:cxnLst/>
@@ -1060,42 +1448,42 @@
       </p:sp>
       <p:grpSp>
         <p:nvGrpSpPr>
-          <p:cNvPr id="12" name=""/>
+          <p:cNvPr id="13" name=""/>
           <p:cNvGrpSpPr/>
           <p:nvPr/>
         </p:nvGrpSpPr>
         <p:grpSpPr>
           <a:xfrm>
-            <a:off x="3780360" y="396000"/>
-            <a:ext cx="719640" cy="1043640"/>
-            <a:chOff x="3780360" y="396000"/>
-            <a:chExt cx="719640" cy="1043640"/>
+            <a:off x="3780720" y="306000"/>
+            <a:ext cx="719280" cy="1043280"/>
+            <a:chOff x="3780720" y="306000"/>
+            <a:chExt cx="719280" cy="1043280"/>
           </a:xfrm>
         </p:grpSpPr>
         <p:grpSp>
           <p:nvGrpSpPr>
-            <p:cNvPr id="13" name=""/>
+            <p:cNvPr id="14" name=""/>
             <p:cNvGrpSpPr/>
             <p:nvPr/>
           </p:nvGrpSpPr>
           <p:grpSpPr>
             <a:xfrm>
-              <a:off x="3780360" y="396000"/>
-              <a:ext cx="719640" cy="1043640"/>
-              <a:chOff x="3780360" y="396000"/>
-              <a:chExt cx="719640" cy="1043640"/>
+              <a:off x="3780720" y="306000"/>
+              <a:ext cx="719280" cy="1043280"/>
+              <a:chOff x="3780720" y="306000"/>
+              <a:chExt cx="719280" cy="1043280"/>
             </a:xfrm>
           </p:grpSpPr>
           <p:sp>
             <p:nvSpPr>
-              <p:cNvPr id="14" name=""/>
+              <p:cNvPr id="15" name=""/>
               <p:cNvSpPr/>
               <p:nvPr/>
             </p:nvSpPr>
             <p:spPr>
               <a:xfrm rot="10800000">
-                <a:off x="3780360" y="719640"/>
-                <a:ext cx="719640" cy="719640"/>
+                <a:off x="3780720" y="629640"/>
+                <a:ext cx="719280" cy="719280"/>
               </a:xfrm>
               <a:prstGeom prst="chord">
                 <a:avLst>
@@ -1136,14 +1524,14 @@
           </p:sp>
           <p:sp>
             <p:nvSpPr>
-              <p:cNvPr id="15" name=""/>
+              <p:cNvPr id="16" name=""/>
               <p:cNvSpPr/>
               <p:nvPr/>
             </p:nvSpPr>
             <p:spPr>
               <a:xfrm>
-                <a:off x="3960000" y="396000"/>
-                <a:ext cx="359640" cy="359640"/>
+                <a:off x="3960000" y="306000"/>
+                <a:ext cx="359280" cy="359280"/>
               </a:xfrm>
               <a:prstGeom prst="ellipse">
                 <a:avLst/>
@@ -1183,37 +1571,14 @@
       </p:grpSp>
       <p:cxnSp>
         <p:nvCxnSpPr>
-          <p:cNvPr id="16" name=""/>
-          <p:cNvCxnSpPr/>
-          <p:nvPr/>
-        </p:nvCxnSpPr>
-        <p:spPr>
-          <a:xfrm>
-            <a:off x="2844000" y="828000"/>
-            <a:ext cx="659520" cy="720"/>
-          </a:xfrm>
-          <a:prstGeom prst="straightConnector1">
-            <a:avLst/>
-          </a:prstGeom>
-          <a:ln w="0">
-            <a:solidFill>
-              <a:srgbClr val="000000"/>
-            </a:solidFill>
-            <a:headEnd len="med" type="triangle" w="med"/>
-            <a:tailEnd len="med" type="triangle" w="med"/>
-          </a:ln>
-        </p:spPr>
-      </p:cxnSp>
-      <p:cxnSp>
-        <p:nvCxnSpPr>
           <p:cNvPr id="17" name=""/>
           <p:cNvCxnSpPr/>
           <p:nvPr/>
         </p:nvCxnSpPr>
         <p:spPr>
           <a:xfrm>
-            <a:off x="1437840" y="1561320"/>
-            <a:ext cx="12240" cy="559080"/>
+            <a:off x="2844000" y="827280"/>
+            <a:ext cx="659880" cy="1080"/>
           </a:xfrm>
           <a:prstGeom prst="straightConnector1">
             <a:avLst/>
@@ -1235,8 +1600,8 @@
         </p:nvCxnSpPr>
         <p:spPr>
           <a:xfrm>
-            <a:off x="3944880" y="3513960"/>
-            <a:ext cx="15480" cy="626400"/>
+            <a:off x="1433880" y="1561320"/>
+            <a:ext cx="12600" cy="559440"/>
           </a:xfrm>
           <a:prstGeom prst="straightConnector1">
             <a:avLst/>
@@ -1258,8 +1623,31 @@
         </p:nvCxnSpPr>
         <p:spPr>
           <a:xfrm>
-            <a:off x="5100840" y="2718000"/>
-            <a:ext cx="520200" cy="6120"/>
+            <a:off x="3922560" y="3381480"/>
+            <a:ext cx="15840" cy="626760"/>
+          </a:xfrm>
+          <a:prstGeom prst="straightConnector1">
+            <a:avLst/>
+          </a:prstGeom>
+          <a:ln w="0">
+            <a:solidFill>
+              <a:srgbClr val="000000"/>
+            </a:solidFill>
+            <a:headEnd len="med" type="triangle" w="med"/>
+            <a:tailEnd len="med" type="triangle" w="med"/>
+          </a:ln>
+        </p:spPr>
+      </p:cxnSp>
+      <p:cxnSp>
+        <p:nvCxnSpPr>
+          <p:cNvPr id="20" name=""/>
+          <p:cNvCxnSpPr/>
+          <p:nvPr/>
+        </p:nvCxnSpPr>
+        <p:spPr>
+          <a:xfrm>
+            <a:off x="4870080" y="2706120"/>
+            <a:ext cx="520560" cy="6480"/>
           </a:xfrm>
           <a:prstGeom prst="straightConnector1">
             <a:avLst/>
@@ -1275,14 +1663,14 @@
       </p:cxnSp>
       <p:sp>
         <p:nvSpPr>
-          <p:cNvPr id="20" name=""/>
+          <p:cNvPr id="21" name=""/>
           <p:cNvSpPr/>
           <p:nvPr/>
         </p:nvSpPr>
         <p:spPr>
           <a:xfrm>
-            <a:off x="5760360" y="2340360"/>
-            <a:ext cx="1439640" cy="719640"/>
+            <a:off x="5640120" y="2349360"/>
+            <a:ext cx="1439280" cy="719280"/>
           </a:xfrm>
           <a:prstGeom prst="rect">
             <a:avLst/>
@@ -1364,14 +1752,14 @@
       </p:sp>
       <p:cxnSp>
         <p:nvCxnSpPr>
-          <p:cNvPr id="21" name=""/>
+          <p:cNvPr id="22" name=""/>
           <p:cNvCxnSpPr/>
           <p:nvPr/>
         </p:nvCxnSpPr>
         <p:spPr>
           <a:xfrm flipV="1">
-            <a:off x="7430400" y="2718360"/>
-            <a:ext cx="489960" cy="10080"/>
+            <a:off x="7345080" y="2703960"/>
+            <a:ext cx="490320" cy="10440"/>
           </a:xfrm>
           <a:prstGeom prst="straightConnector1">
             <a:avLst/>
@@ -1387,14 +1775,14 @@
       </p:cxnSp>
       <p:sp>
         <p:nvSpPr>
-          <p:cNvPr id="22" name=""/>
+          <p:cNvPr id="23" name=""/>
           <p:cNvSpPr/>
           <p:nvPr/>
         </p:nvSpPr>
         <p:spPr>
           <a:xfrm>
             <a:off x="3240000" y="4320000"/>
-            <a:ext cx="1439640" cy="719640"/>
+            <a:ext cx="1439280" cy="719280"/>
           </a:xfrm>
           <a:prstGeom prst="rect">
             <a:avLst/>
@@ -1479,14 +1867,14 @@
       </p:sp>
       <p:cxnSp>
         <p:nvCxnSpPr>
-          <p:cNvPr id="23" name=""/>
+          <p:cNvPr id="24" name=""/>
           <p:cNvCxnSpPr/>
           <p:nvPr/>
         </p:nvCxnSpPr>
         <p:spPr>
           <a:xfrm>
-            <a:off x="2700000" y="2700000"/>
-            <a:ext cx="520200" cy="6120"/>
+            <a:off x="2520000" y="2706120"/>
+            <a:ext cx="520560" cy="6480"/>
           </a:xfrm>
           <a:prstGeom prst="straightConnector1">
             <a:avLst/>
